--- a/public/videos/repositories/kaden-hikaku/kaden-hikaku-tech-preview.pptx
+++ b/public/videos/repositories/kaden-hikaku/kaden-hikaku-tech-preview.pptx
@@ -134,7 +134,7 @@
           <p:cNvPr id="2" name="タイトル 1">
             <a:extLst>
               <a:ext uri="{FF2B5EF4-FFF2-40B4-BE49-F238E27FC236}">
-                <a16:creationId xmlns:a16="http://schemas.microsoft.com/office/drawing/2014/main" id="{74FE4B05-5544-D26A-5C05-E09E9E45CA7A}"/>
+                <a16:creationId xmlns:a16="http://schemas.microsoft.com/office/drawing/2014/main" id="{36AE39F3-EAF8-9D5F-8EFF-B9B8F6C49EBE}"/>
               </a:ext>
             </a:extLst>
           </p:cNvPr>
@@ -171,7 +171,7 @@
           <p:cNvPr id="3" name="字幕 2">
             <a:extLst>
               <a:ext uri="{FF2B5EF4-FFF2-40B4-BE49-F238E27FC236}">
-                <a16:creationId xmlns:a16="http://schemas.microsoft.com/office/drawing/2014/main" id="{44ADD57D-C880-E577-CE36-94D70F0B59FB}"/>
+                <a16:creationId xmlns:a16="http://schemas.microsoft.com/office/drawing/2014/main" id="{F85321E4-9EBE-04EF-8487-FB2079AF5A25}"/>
               </a:ext>
             </a:extLst>
           </p:cNvPr>
@@ -241,7 +241,7 @@
           <p:cNvPr id="4" name="日付プレースホルダー 3">
             <a:extLst>
               <a:ext uri="{FF2B5EF4-FFF2-40B4-BE49-F238E27FC236}">
-                <a16:creationId xmlns:a16="http://schemas.microsoft.com/office/drawing/2014/main" id="{A58B1198-B8B9-43EC-B81F-FD0E1247CAAA}"/>
+                <a16:creationId xmlns:a16="http://schemas.microsoft.com/office/drawing/2014/main" id="{FBDD50BD-D7ED-F866-82AE-45BFB7248A67}"/>
               </a:ext>
             </a:extLst>
           </p:cNvPr>
@@ -257,7 +257,7 @@
           <a:bodyPr/>
           <a:lstStyle/>
           <a:p>
-            <a:fld id="{6A1F17D6-7062-4BF8-B98C-E2985FD546AB}" type="datetimeFigureOut">
+            <a:fld id="{427ADE61-E60F-4A98-AE7F-7EF4A5D76E1A}" type="datetimeFigureOut">
               <a:rPr kumimoji="1" lang="ja-JP" altLang="en-US" smtClean="0"/>
               <a:t>2026/7/30</a:t>
             </a:fld>
@@ -270,7 +270,7 @@
           <p:cNvPr id="5" name="フッター プレースホルダー 4">
             <a:extLst>
               <a:ext uri="{FF2B5EF4-FFF2-40B4-BE49-F238E27FC236}">
-                <a16:creationId xmlns:a16="http://schemas.microsoft.com/office/drawing/2014/main" id="{60DB4474-EE25-FC1A-868E-757D1CC57A5F}"/>
+                <a16:creationId xmlns:a16="http://schemas.microsoft.com/office/drawing/2014/main" id="{4B35C60A-A2B9-2BC2-39FB-56D8B6A7B3CF}"/>
               </a:ext>
             </a:extLst>
           </p:cNvPr>
@@ -295,7 +295,7 @@
           <p:cNvPr id="6" name="スライド番号プレースホルダー 5">
             <a:extLst>
               <a:ext uri="{FF2B5EF4-FFF2-40B4-BE49-F238E27FC236}">
-                <a16:creationId xmlns:a16="http://schemas.microsoft.com/office/drawing/2014/main" id="{10706AB1-9C7C-45D3-C901-272B0BF69547}"/>
+                <a16:creationId xmlns:a16="http://schemas.microsoft.com/office/drawing/2014/main" id="{9FC9304B-7B11-A765-BACC-8DE2DB501A94}"/>
               </a:ext>
             </a:extLst>
           </p:cNvPr>
@@ -311,7 +311,7 @@
           <a:bodyPr/>
           <a:lstStyle/>
           <a:p>
-            <a:fld id="{A52FF8C5-4848-4CD7-A875-AE86F1D0B263}" type="slidenum">
+            <a:fld id="{FB73397F-3170-4454-958A-B40DE46009D4}" type="slidenum">
               <a:rPr kumimoji="1" lang="ja-JP" altLang="en-US" smtClean="0"/>
               <a:t>‹#›</a:t>
             </a:fld>
@@ -322,7 +322,7 @@
     </p:spTree>
     <p:extLst>
       <p:ext uri="{BB962C8B-B14F-4D97-AF65-F5344CB8AC3E}">
-        <p14:creationId xmlns:p14="http://schemas.microsoft.com/office/powerpoint/2010/main" val="1348109371"/>
+        <p14:creationId xmlns:p14="http://schemas.microsoft.com/office/powerpoint/2010/main" val="589155246"/>
       </p:ext>
     </p:extLst>
   </p:cSld>
@@ -354,7 +354,7 @@
           <p:cNvPr id="2" name="タイトル 1">
             <a:extLst>
               <a:ext uri="{FF2B5EF4-FFF2-40B4-BE49-F238E27FC236}">
-                <a16:creationId xmlns:a16="http://schemas.microsoft.com/office/drawing/2014/main" id="{28120EFB-194C-E17F-D96B-5C95C83257B8}"/>
+                <a16:creationId xmlns:a16="http://schemas.microsoft.com/office/drawing/2014/main" id="{7502A10E-6E74-55EA-102D-1ADA61FD4A7E}"/>
               </a:ext>
             </a:extLst>
           </p:cNvPr>
@@ -382,7 +382,7 @@
           <p:cNvPr id="3" name="縦書きテキスト プレースホルダー 2">
             <a:extLst>
               <a:ext uri="{FF2B5EF4-FFF2-40B4-BE49-F238E27FC236}">
-                <a16:creationId xmlns:a16="http://schemas.microsoft.com/office/drawing/2014/main" id="{7DF7304A-EB56-733D-790C-527AE1BED93F}"/>
+                <a16:creationId xmlns:a16="http://schemas.microsoft.com/office/drawing/2014/main" id="{2368CA59-BBDB-27F9-CCA9-2B4A9282AFD2}"/>
               </a:ext>
             </a:extLst>
           </p:cNvPr>
@@ -471,7 +471,7 @@
           <p:cNvPr id="4" name="日付プレースホルダー 3">
             <a:extLst>
               <a:ext uri="{FF2B5EF4-FFF2-40B4-BE49-F238E27FC236}">
-                <a16:creationId xmlns:a16="http://schemas.microsoft.com/office/drawing/2014/main" id="{F4F3B22E-2461-AF38-04E5-9C31D2121B1A}"/>
+                <a16:creationId xmlns:a16="http://schemas.microsoft.com/office/drawing/2014/main" id="{8CF00135-A155-4C2B-ECA3-A64353AAD5F6}"/>
               </a:ext>
             </a:extLst>
           </p:cNvPr>
@@ -487,7 +487,7 @@
           <a:bodyPr/>
           <a:lstStyle/>
           <a:p>
-            <a:fld id="{6A1F17D6-7062-4BF8-B98C-E2985FD546AB}" type="datetimeFigureOut">
+            <a:fld id="{427ADE61-E60F-4A98-AE7F-7EF4A5D76E1A}" type="datetimeFigureOut">
               <a:rPr kumimoji="1" lang="ja-JP" altLang="en-US" smtClean="0"/>
               <a:t>2026/7/30</a:t>
             </a:fld>
@@ -500,7 +500,7 @@
           <p:cNvPr id="5" name="フッター プレースホルダー 4">
             <a:extLst>
               <a:ext uri="{FF2B5EF4-FFF2-40B4-BE49-F238E27FC236}">
-                <a16:creationId xmlns:a16="http://schemas.microsoft.com/office/drawing/2014/main" id="{B4688CAF-3590-2D0A-A57B-06292D238F1A}"/>
+                <a16:creationId xmlns:a16="http://schemas.microsoft.com/office/drawing/2014/main" id="{F5B6EA7E-57F1-1920-6239-C73A49A8FE87}"/>
               </a:ext>
             </a:extLst>
           </p:cNvPr>
@@ -525,7 +525,7 @@
           <p:cNvPr id="6" name="スライド番号プレースホルダー 5">
             <a:extLst>
               <a:ext uri="{FF2B5EF4-FFF2-40B4-BE49-F238E27FC236}">
-                <a16:creationId xmlns:a16="http://schemas.microsoft.com/office/drawing/2014/main" id="{53384A18-110F-5E11-881F-879C72581899}"/>
+                <a16:creationId xmlns:a16="http://schemas.microsoft.com/office/drawing/2014/main" id="{E586F827-99BD-9D7E-E1FA-AB31BFB772FF}"/>
               </a:ext>
             </a:extLst>
           </p:cNvPr>
@@ -541,7 +541,7 @@
           <a:bodyPr/>
           <a:lstStyle/>
           <a:p>
-            <a:fld id="{A52FF8C5-4848-4CD7-A875-AE86F1D0B263}" type="slidenum">
+            <a:fld id="{FB73397F-3170-4454-958A-B40DE46009D4}" type="slidenum">
               <a:rPr kumimoji="1" lang="ja-JP" altLang="en-US" smtClean="0"/>
               <a:t>‹#›</a:t>
             </a:fld>
@@ -552,7 +552,7 @@
     </p:spTree>
     <p:extLst>
       <p:ext uri="{BB962C8B-B14F-4D97-AF65-F5344CB8AC3E}">
-        <p14:creationId xmlns:p14="http://schemas.microsoft.com/office/powerpoint/2010/main" val="910814697"/>
+        <p14:creationId xmlns:p14="http://schemas.microsoft.com/office/powerpoint/2010/main" val="3913951245"/>
       </p:ext>
     </p:extLst>
   </p:cSld>
@@ -584,7 +584,7 @@
           <p:cNvPr id="2" name="縦書きタイトル 1">
             <a:extLst>
               <a:ext uri="{FF2B5EF4-FFF2-40B4-BE49-F238E27FC236}">
-                <a16:creationId xmlns:a16="http://schemas.microsoft.com/office/drawing/2014/main" id="{28E3C585-64DA-7FD1-34F4-9D4BA91EF1ED}"/>
+                <a16:creationId xmlns:a16="http://schemas.microsoft.com/office/drawing/2014/main" id="{E8A6A67E-A425-8489-87D7-A6ED19B6BF55}"/>
               </a:ext>
             </a:extLst>
           </p:cNvPr>
@@ -617,7 +617,7 @@
           <p:cNvPr id="3" name="縦書きテキスト プレースホルダー 2">
             <a:extLst>
               <a:ext uri="{FF2B5EF4-FFF2-40B4-BE49-F238E27FC236}">
-                <a16:creationId xmlns:a16="http://schemas.microsoft.com/office/drawing/2014/main" id="{B296CB04-D8FE-EA45-EC66-4C9E53AADEF1}"/>
+                <a16:creationId xmlns:a16="http://schemas.microsoft.com/office/drawing/2014/main" id="{F5DE5E27-8B87-2014-89B0-74C8832A73AD}"/>
               </a:ext>
             </a:extLst>
           </p:cNvPr>
@@ -711,7 +711,7 @@
           <p:cNvPr id="4" name="日付プレースホルダー 3">
             <a:extLst>
               <a:ext uri="{FF2B5EF4-FFF2-40B4-BE49-F238E27FC236}">
-                <a16:creationId xmlns:a16="http://schemas.microsoft.com/office/drawing/2014/main" id="{70A10CCC-8EAC-DEA5-9F44-0A42567DB16A}"/>
+                <a16:creationId xmlns:a16="http://schemas.microsoft.com/office/drawing/2014/main" id="{33B83F9E-A5CB-2CD2-3470-B6E313F9EF02}"/>
               </a:ext>
             </a:extLst>
           </p:cNvPr>
@@ -727,7 +727,7 @@
           <a:bodyPr/>
           <a:lstStyle/>
           <a:p>
-            <a:fld id="{6A1F17D6-7062-4BF8-B98C-E2985FD546AB}" type="datetimeFigureOut">
+            <a:fld id="{427ADE61-E60F-4A98-AE7F-7EF4A5D76E1A}" type="datetimeFigureOut">
               <a:rPr kumimoji="1" lang="ja-JP" altLang="en-US" smtClean="0"/>
               <a:t>2026/7/30</a:t>
             </a:fld>
@@ -740,7 +740,7 @@
           <p:cNvPr id="5" name="フッター プレースホルダー 4">
             <a:extLst>
               <a:ext uri="{FF2B5EF4-FFF2-40B4-BE49-F238E27FC236}">
-                <a16:creationId xmlns:a16="http://schemas.microsoft.com/office/drawing/2014/main" id="{21571108-6F9D-4DC4-A658-0744725C6473}"/>
+                <a16:creationId xmlns:a16="http://schemas.microsoft.com/office/drawing/2014/main" id="{E03E57C9-02CD-11DC-1AB4-FB6FCAF9FFBB}"/>
               </a:ext>
             </a:extLst>
           </p:cNvPr>
@@ -765,7 +765,7 @@
           <p:cNvPr id="6" name="スライド番号プレースホルダー 5">
             <a:extLst>
               <a:ext uri="{FF2B5EF4-FFF2-40B4-BE49-F238E27FC236}">
-                <a16:creationId xmlns:a16="http://schemas.microsoft.com/office/drawing/2014/main" id="{E389C7AC-BD33-794D-BE74-37CAECD67A2E}"/>
+                <a16:creationId xmlns:a16="http://schemas.microsoft.com/office/drawing/2014/main" id="{147F7B0B-0D5F-7824-3BEA-F26C9C324513}"/>
               </a:ext>
             </a:extLst>
           </p:cNvPr>
@@ -781,7 +781,7 @@
           <a:bodyPr/>
           <a:lstStyle/>
           <a:p>
-            <a:fld id="{A52FF8C5-4848-4CD7-A875-AE86F1D0B263}" type="slidenum">
+            <a:fld id="{FB73397F-3170-4454-958A-B40DE46009D4}" type="slidenum">
               <a:rPr kumimoji="1" lang="ja-JP" altLang="en-US" smtClean="0"/>
               <a:t>‹#›</a:t>
             </a:fld>
@@ -792,7 +792,7 @@
     </p:spTree>
     <p:extLst>
       <p:ext uri="{BB962C8B-B14F-4D97-AF65-F5344CB8AC3E}">
-        <p14:creationId xmlns:p14="http://schemas.microsoft.com/office/powerpoint/2010/main" val="3864369077"/>
+        <p14:creationId xmlns:p14="http://schemas.microsoft.com/office/powerpoint/2010/main" val="3465628590"/>
       </p:ext>
     </p:extLst>
   </p:cSld>
@@ -824,7 +824,7 @@
           <p:cNvPr id="2" name="タイトル 1">
             <a:extLst>
               <a:ext uri="{FF2B5EF4-FFF2-40B4-BE49-F238E27FC236}">
-                <a16:creationId xmlns:a16="http://schemas.microsoft.com/office/drawing/2014/main" id="{B8D3044A-3A7F-00DB-6B53-B9792DE466D4}"/>
+                <a16:creationId xmlns:a16="http://schemas.microsoft.com/office/drawing/2014/main" id="{6C6BBFDA-ED8E-5A3E-E453-0A9ACDE4E2AA}"/>
               </a:ext>
             </a:extLst>
           </p:cNvPr>
@@ -852,7 +852,7 @@
           <p:cNvPr id="3" name="コンテンツ プレースホルダー 2">
             <a:extLst>
               <a:ext uri="{FF2B5EF4-FFF2-40B4-BE49-F238E27FC236}">
-                <a16:creationId xmlns:a16="http://schemas.microsoft.com/office/drawing/2014/main" id="{A5F41832-5B6B-EE06-4D44-C7A02D54DD3E}"/>
+                <a16:creationId xmlns:a16="http://schemas.microsoft.com/office/drawing/2014/main" id="{4CB7864D-FB64-BBE0-DAE0-93FA3422C90F}"/>
               </a:ext>
             </a:extLst>
           </p:cNvPr>
@@ -941,7 +941,7 @@
           <p:cNvPr id="4" name="日付プレースホルダー 3">
             <a:extLst>
               <a:ext uri="{FF2B5EF4-FFF2-40B4-BE49-F238E27FC236}">
-                <a16:creationId xmlns:a16="http://schemas.microsoft.com/office/drawing/2014/main" id="{D51786F4-65DA-BDA1-C353-27EF2462D29F}"/>
+                <a16:creationId xmlns:a16="http://schemas.microsoft.com/office/drawing/2014/main" id="{C7B3F336-2898-F49A-6E09-EB4E961A54FD}"/>
               </a:ext>
             </a:extLst>
           </p:cNvPr>
@@ -957,7 +957,7 @@
           <a:bodyPr/>
           <a:lstStyle/>
           <a:p>
-            <a:fld id="{6A1F17D6-7062-4BF8-B98C-E2985FD546AB}" type="datetimeFigureOut">
+            <a:fld id="{427ADE61-E60F-4A98-AE7F-7EF4A5D76E1A}" type="datetimeFigureOut">
               <a:rPr kumimoji="1" lang="ja-JP" altLang="en-US" smtClean="0"/>
               <a:t>2026/7/30</a:t>
             </a:fld>
@@ -970,7 +970,7 @@
           <p:cNvPr id="5" name="フッター プレースホルダー 4">
             <a:extLst>
               <a:ext uri="{FF2B5EF4-FFF2-40B4-BE49-F238E27FC236}">
-                <a16:creationId xmlns:a16="http://schemas.microsoft.com/office/drawing/2014/main" id="{F0990E83-3E0C-77C0-EC75-7247C96C8123}"/>
+                <a16:creationId xmlns:a16="http://schemas.microsoft.com/office/drawing/2014/main" id="{309ED42E-2818-96F3-4A8C-CB8644D32404}"/>
               </a:ext>
             </a:extLst>
           </p:cNvPr>
@@ -995,7 +995,7 @@
           <p:cNvPr id="6" name="スライド番号プレースホルダー 5">
             <a:extLst>
               <a:ext uri="{FF2B5EF4-FFF2-40B4-BE49-F238E27FC236}">
-                <a16:creationId xmlns:a16="http://schemas.microsoft.com/office/drawing/2014/main" id="{E7AC7E23-4FEB-CA3B-12D9-39826E636217}"/>
+                <a16:creationId xmlns:a16="http://schemas.microsoft.com/office/drawing/2014/main" id="{BB6888FE-3BA6-72BF-12B7-07C6092261F3}"/>
               </a:ext>
             </a:extLst>
           </p:cNvPr>
@@ -1011,7 +1011,7 @@
           <a:bodyPr/>
           <a:lstStyle/>
           <a:p>
-            <a:fld id="{A52FF8C5-4848-4CD7-A875-AE86F1D0B263}" type="slidenum">
+            <a:fld id="{FB73397F-3170-4454-958A-B40DE46009D4}" type="slidenum">
               <a:rPr kumimoji="1" lang="ja-JP" altLang="en-US" smtClean="0"/>
               <a:t>‹#›</a:t>
             </a:fld>
@@ -1022,7 +1022,7 @@
     </p:spTree>
     <p:extLst>
       <p:ext uri="{BB962C8B-B14F-4D97-AF65-F5344CB8AC3E}">
-        <p14:creationId xmlns:p14="http://schemas.microsoft.com/office/powerpoint/2010/main" val="1079565582"/>
+        <p14:creationId xmlns:p14="http://schemas.microsoft.com/office/powerpoint/2010/main" val="4215404812"/>
       </p:ext>
     </p:extLst>
   </p:cSld>
@@ -1054,7 +1054,7 @@
           <p:cNvPr id="2" name="タイトル 1">
             <a:extLst>
               <a:ext uri="{FF2B5EF4-FFF2-40B4-BE49-F238E27FC236}">
-                <a16:creationId xmlns:a16="http://schemas.microsoft.com/office/drawing/2014/main" id="{1F00DAEF-B849-E77A-8236-CAE32C4A237E}"/>
+                <a16:creationId xmlns:a16="http://schemas.microsoft.com/office/drawing/2014/main" id="{44962F6A-0813-43F4-3322-42F74D3D3B9B}"/>
               </a:ext>
             </a:extLst>
           </p:cNvPr>
@@ -1091,7 +1091,7 @@
           <p:cNvPr id="3" name="テキスト プレースホルダー 2">
             <a:extLst>
               <a:ext uri="{FF2B5EF4-FFF2-40B4-BE49-F238E27FC236}">
-                <a16:creationId xmlns:a16="http://schemas.microsoft.com/office/drawing/2014/main" id="{9DFFFF0B-A958-8670-4149-B60BF556A050}"/>
+                <a16:creationId xmlns:a16="http://schemas.microsoft.com/office/drawing/2014/main" id="{C7363AC1-235A-9247-75DA-D8C9FC8E56F7}"/>
               </a:ext>
             </a:extLst>
           </p:cNvPr>
@@ -1216,7 +1216,7 @@
           <p:cNvPr id="4" name="日付プレースホルダー 3">
             <a:extLst>
               <a:ext uri="{FF2B5EF4-FFF2-40B4-BE49-F238E27FC236}">
-                <a16:creationId xmlns:a16="http://schemas.microsoft.com/office/drawing/2014/main" id="{D7B2A7A1-169A-193A-626A-0E79077BF3EF}"/>
+                <a16:creationId xmlns:a16="http://schemas.microsoft.com/office/drawing/2014/main" id="{2BDE6018-0100-A110-45CD-4374C82D144A}"/>
               </a:ext>
             </a:extLst>
           </p:cNvPr>
@@ -1232,7 +1232,7 @@
           <a:bodyPr/>
           <a:lstStyle/>
           <a:p>
-            <a:fld id="{6A1F17D6-7062-4BF8-B98C-E2985FD546AB}" type="datetimeFigureOut">
+            <a:fld id="{427ADE61-E60F-4A98-AE7F-7EF4A5D76E1A}" type="datetimeFigureOut">
               <a:rPr kumimoji="1" lang="ja-JP" altLang="en-US" smtClean="0"/>
               <a:t>2026/7/30</a:t>
             </a:fld>
@@ -1245,7 +1245,7 @@
           <p:cNvPr id="5" name="フッター プレースホルダー 4">
             <a:extLst>
               <a:ext uri="{FF2B5EF4-FFF2-40B4-BE49-F238E27FC236}">
-                <a16:creationId xmlns:a16="http://schemas.microsoft.com/office/drawing/2014/main" id="{8F1D4F72-16D6-B53D-3F4E-BE82077D0800}"/>
+                <a16:creationId xmlns:a16="http://schemas.microsoft.com/office/drawing/2014/main" id="{366BA7CE-4285-B1EA-D7B6-391B4F3032DE}"/>
               </a:ext>
             </a:extLst>
           </p:cNvPr>
@@ -1270,7 +1270,7 @@
           <p:cNvPr id="6" name="スライド番号プレースホルダー 5">
             <a:extLst>
               <a:ext uri="{FF2B5EF4-FFF2-40B4-BE49-F238E27FC236}">
-                <a16:creationId xmlns:a16="http://schemas.microsoft.com/office/drawing/2014/main" id="{DAA5A01D-EDD5-0BBE-3A14-2DDF26955D52}"/>
+                <a16:creationId xmlns:a16="http://schemas.microsoft.com/office/drawing/2014/main" id="{03C36040-16CD-9909-AAAA-CE8A473C9DD1}"/>
               </a:ext>
             </a:extLst>
           </p:cNvPr>
@@ -1286,7 +1286,7 @@
           <a:bodyPr/>
           <a:lstStyle/>
           <a:p>
-            <a:fld id="{A52FF8C5-4848-4CD7-A875-AE86F1D0B263}" type="slidenum">
+            <a:fld id="{FB73397F-3170-4454-958A-B40DE46009D4}" type="slidenum">
               <a:rPr kumimoji="1" lang="ja-JP" altLang="en-US" smtClean="0"/>
               <a:t>‹#›</a:t>
             </a:fld>
@@ -1297,7 +1297,7 @@
     </p:spTree>
     <p:extLst>
       <p:ext uri="{BB962C8B-B14F-4D97-AF65-F5344CB8AC3E}">
-        <p14:creationId xmlns:p14="http://schemas.microsoft.com/office/powerpoint/2010/main" val="3716097149"/>
+        <p14:creationId xmlns:p14="http://schemas.microsoft.com/office/powerpoint/2010/main" val="1453809518"/>
       </p:ext>
     </p:extLst>
   </p:cSld>
@@ -1329,7 +1329,7 @@
           <p:cNvPr id="2" name="タイトル 1">
             <a:extLst>
               <a:ext uri="{FF2B5EF4-FFF2-40B4-BE49-F238E27FC236}">
-                <a16:creationId xmlns:a16="http://schemas.microsoft.com/office/drawing/2014/main" id="{D268E019-857F-A311-42F9-0F6E82424217}"/>
+                <a16:creationId xmlns:a16="http://schemas.microsoft.com/office/drawing/2014/main" id="{9973E1C5-B37A-D860-EEA9-51315E0967A8}"/>
               </a:ext>
             </a:extLst>
           </p:cNvPr>
@@ -1357,7 +1357,7 @@
           <p:cNvPr id="3" name="コンテンツ プレースホルダー 2">
             <a:extLst>
               <a:ext uri="{FF2B5EF4-FFF2-40B4-BE49-F238E27FC236}">
-                <a16:creationId xmlns:a16="http://schemas.microsoft.com/office/drawing/2014/main" id="{EE7297C9-7525-28D4-8607-BFB50D362089}"/>
+                <a16:creationId xmlns:a16="http://schemas.microsoft.com/office/drawing/2014/main" id="{6743A800-DA32-4804-7F99-3C5FD7D3A382}"/>
               </a:ext>
             </a:extLst>
           </p:cNvPr>
@@ -1451,7 +1451,7 @@
           <p:cNvPr id="4" name="コンテンツ プレースホルダー 3">
             <a:extLst>
               <a:ext uri="{FF2B5EF4-FFF2-40B4-BE49-F238E27FC236}">
-                <a16:creationId xmlns:a16="http://schemas.microsoft.com/office/drawing/2014/main" id="{3A36294B-2BE3-27BB-559B-9003C68A7EAE}"/>
+                <a16:creationId xmlns:a16="http://schemas.microsoft.com/office/drawing/2014/main" id="{DCAED762-1109-889A-8C9A-838968BCB90E}"/>
               </a:ext>
             </a:extLst>
           </p:cNvPr>
@@ -1545,7 +1545,7 @@
           <p:cNvPr id="5" name="日付プレースホルダー 4">
             <a:extLst>
               <a:ext uri="{FF2B5EF4-FFF2-40B4-BE49-F238E27FC236}">
-                <a16:creationId xmlns:a16="http://schemas.microsoft.com/office/drawing/2014/main" id="{982FBBF7-4568-BA23-1364-C3BAFF3B6965}"/>
+                <a16:creationId xmlns:a16="http://schemas.microsoft.com/office/drawing/2014/main" id="{01186970-F75A-6DDB-1D77-B657A113F0C3}"/>
               </a:ext>
             </a:extLst>
           </p:cNvPr>
@@ -1561,7 +1561,7 @@
           <a:bodyPr/>
           <a:lstStyle/>
           <a:p>
-            <a:fld id="{6A1F17D6-7062-4BF8-B98C-E2985FD546AB}" type="datetimeFigureOut">
+            <a:fld id="{427ADE61-E60F-4A98-AE7F-7EF4A5D76E1A}" type="datetimeFigureOut">
               <a:rPr kumimoji="1" lang="ja-JP" altLang="en-US" smtClean="0"/>
               <a:t>2026/7/30</a:t>
             </a:fld>
@@ -1574,7 +1574,7 @@
           <p:cNvPr id="6" name="フッター プレースホルダー 5">
             <a:extLst>
               <a:ext uri="{FF2B5EF4-FFF2-40B4-BE49-F238E27FC236}">
-                <a16:creationId xmlns:a16="http://schemas.microsoft.com/office/drawing/2014/main" id="{88032755-38E3-0AE6-DE2E-CDCC0BD0CBCD}"/>
+                <a16:creationId xmlns:a16="http://schemas.microsoft.com/office/drawing/2014/main" id="{806AE8C5-4289-08C9-5E5B-E40648DFA326}"/>
               </a:ext>
             </a:extLst>
           </p:cNvPr>
@@ -1599,7 +1599,7 @@
           <p:cNvPr id="7" name="スライド番号プレースホルダー 6">
             <a:extLst>
               <a:ext uri="{FF2B5EF4-FFF2-40B4-BE49-F238E27FC236}">
-                <a16:creationId xmlns:a16="http://schemas.microsoft.com/office/drawing/2014/main" id="{B7E6C856-6F57-2EFA-DAC1-321C668816E2}"/>
+                <a16:creationId xmlns:a16="http://schemas.microsoft.com/office/drawing/2014/main" id="{5CA201B4-878C-C762-DA51-2AFB896F5A92}"/>
               </a:ext>
             </a:extLst>
           </p:cNvPr>
@@ -1615,7 +1615,7 @@
           <a:bodyPr/>
           <a:lstStyle/>
           <a:p>
-            <a:fld id="{A52FF8C5-4848-4CD7-A875-AE86F1D0B263}" type="slidenum">
+            <a:fld id="{FB73397F-3170-4454-958A-B40DE46009D4}" type="slidenum">
               <a:rPr kumimoji="1" lang="ja-JP" altLang="en-US" smtClean="0"/>
               <a:t>‹#›</a:t>
             </a:fld>
@@ -1626,7 +1626,7 @@
     </p:spTree>
     <p:extLst>
       <p:ext uri="{BB962C8B-B14F-4D97-AF65-F5344CB8AC3E}">
-        <p14:creationId xmlns:p14="http://schemas.microsoft.com/office/powerpoint/2010/main" val="1808980620"/>
+        <p14:creationId xmlns:p14="http://schemas.microsoft.com/office/powerpoint/2010/main" val="1660595990"/>
       </p:ext>
     </p:extLst>
   </p:cSld>
@@ -1658,7 +1658,7 @@
           <p:cNvPr id="2" name="タイトル 1">
             <a:extLst>
               <a:ext uri="{FF2B5EF4-FFF2-40B4-BE49-F238E27FC236}">
-                <a16:creationId xmlns:a16="http://schemas.microsoft.com/office/drawing/2014/main" id="{D40A0A2C-D163-2FB0-67AC-16AB696068F7}"/>
+                <a16:creationId xmlns:a16="http://schemas.microsoft.com/office/drawing/2014/main" id="{28186AAC-EBCC-155F-91F0-E902AB3A2CA5}"/>
               </a:ext>
             </a:extLst>
           </p:cNvPr>
@@ -1691,7 +1691,7 @@
           <p:cNvPr id="3" name="テキスト プレースホルダー 2">
             <a:extLst>
               <a:ext uri="{FF2B5EF4-FFF2-40B4-BE49-F238E27FC236}">
-                <a16:creationId xmlns:a16="http://schemas.microsoft.com/office/drawing/2014/main" id="{74BD5E90-AFD8-3E51-3498-59B4938DB0E8}"/>
+                <a16:creationId xmlns:a16="http://schemas.microsoft.com/office/drawing/2014/main" id="{CAB35AB7-A906-D62C-A2BC-9072151F6B10}"/>
               </a:ext>
             </a:extLst>
           </p:cNvPr>
@@ -1762,7 +1762,7 @@
           <p:cNvPr id="4" name="コンテンツ プレースホルダー 3">
             <a:extLst>
               <a:ext uri="{FF2B5EF4-FFF2-40B4-BE49-F238E27FC236}">
-                <a16:creationId xmlns:a16="http://schemas.microsoft.com/office/drawing/2014/main" id="{580A2781-17B5-5239-288E-B100BFCAE166}"/>
+                <a16:creationId xmlns:a16="http://schemas.microsoft.com/office/drawing/2014/main" id="{5208FE97-A23B-995F-9C4F-46AD3A317260}"/>
               </a:ext>
             </a:extLst>
           </p:cNvPr>
@@ -1856,7 +1856,7 @@
           <p:cNvPr id="5" name="テキスト プレースホルダー 4">
             <a:extLst>
               <a:ext uri="{FF2B5EF4-FFF2-40B4-BE49-F238E27FC236}">
-                <a16:creationId xmlns:a16="http://schemas.microsoft.com/office/drawing/2014/main" id="{7BD5FBCC-499B-B8AB-59B6-AA69F813B6C2}"/>
+                <a16:creationId xmlns:a16="http://schemas.microsoft.com/office/drawing/2014/main" id="{DCD0ADA0-8DDC-F590-A56E-1D5B0FB41534}"/>
               </a:ext>
             </a:extLst>
           </p:cNvPr>
@@ -1927,7 +1927,7 @@
           <p:cNvPr id="6" name="コンテンツ プレースホルダー 5">
             <a:extLst>
               <a:ext uri="{FF2B5EF4-FFF2-40B4-BE49-F238E27FC236}">
-                <a16:creationId xmlns:a16="http://schemas.microsoft.com/office/drawing/2014/main" id="{4C92E53A-833F-9C72-A1D3-0D426DB542EC}"/>
+                <a16:creationId xmlns:a16="http://schemas.microsoft.com/office/drawing/2014/main" id="{4549BF4F-82BD-7767-C11E-6FBDC327C7C1}"/>
               </a:ext>
             </a:extLst>
           </p:cNvPr>
@@ -2021,7 +2021,7 @@
           <p:cNvPr id="7" name="日付プレースホルダー 6">
             <a:extLst>
               <a:ext uri="{FF2B5EF4-FFF2-40B4-BE49-F238E27FC236}">
-                <a16:creationId xmlns:a16="http://schemas.microsoft.com/office/drawing/2014/main" id="{3FED4739-5EE2-B6A1-B97C-96FC82D5107C}"/>
+                <a16:creationId xmlns:a16="http://schemas.microsoft.com/office/drawing/2014/main" id="{FA6B6E07-96F6-628F-2278-D35C92490840}"/>
               </a:ext>
             </a:extLst>
           </p:cNvPr>
@@ -2037,7 +2037,7 @@
           <a:bodyPr/>
           <a:lstStyle/>
           <a:p>
-            <a:fld id="{6A1F17D6-7062-4BF8-B98C-E2985FD546AB}" type="datetimeFigureOut">
+            <a:fld id="{427ADE61-E60F-4A98-AE7F-7EF4A5D76E1A}" type="datetimeFigureOut">
               <a:rPr kumimoji="1" lang="ja-JP" altLang="en-US" smtClean="0"/>
               <a:t>2026/7/30</a:t>
             </a:fld>
@@ -2050,7 +2050,7 @@
           <p:cNvPr id="8" name="フッター プレースホルダー 7">
             <a:extLst>
               <a:ext uri="{FF2B5EF4-FFF2-40B4-BE49-F238E27FC236}">
-                <a16:creationId xmlns:a16="http://schemas.microsoft.com/office/drawing/2014/main" id="{4FB37040-E4D6-A052-AE9F-039B6FE43120}"/>
+                <a16:creationId xmlns:a16="http://schemas.microsoft.com/office/drawing/2014/main" id="{656AF763-EA85-B3FD-F906-B7667D6E5199}"/>
               </a:ext>
             </a:extLst>
           </p:cNvPr>
@@ -2075,7 +2075,7 @@
           <p:cNvPr id="9" name="スライド番号プレースホルダー 8">
             <a:extLst>
               <a:ext uri="{FF2B5EF4-FFF2-40B4-BE49-F238E27FC236}">
-                <a16:creationId xmlns:a16="http://schemas.microsoft.com/office/drawing/2014/main" id="{DAEED7F1-3C51-BD68-F674-1D502D4EBCFA}"/>
+                <a16:creationId xmlns:a16="http://schemas.microsoft.com/office/drawing/2014/main" id="{4E170854-D7A1-BD9A-DA77-B223A5F7C63A}"/>
               </a:ext>
             </a:extLst>
           </p:cNvPr>
@@ -2091,7 +2091,7 @@
           <a:bodyPr/>
           <a:lstStyle/>
           <a:p>
-            <a:fld id="{A52FF8C5-4848-4CD7-A875-AE86F1D0B263}" type="slidenum">
+            <a:fld id="{FB73397F-3170-4454-958A-B40DE46009D4}" type="slidenum">
               <a:rPr kumimoji="1" lang="ja-JP" altLang="en-US" smtClean="0"/>
               <a:t>‹#›</a:t>
             </a:fld>
@@ -2102,7 +2102,7 @@
     </p:spTree>
     <p:extLst>
       <p:ext uri="{BB962C8B-B14F-4D97-AF65-F5344CB8AC3E}">
-        <p14:creationId xmlns:p14="http://schemas.microsoft.com/office/powerpoint/2010/main" val="1001139299"/>
+        <p14:creationId xmlns:p14="http://schemas.microsoft.com/office/powerpoint/2010/main" val="4026498480"/>
       </p:ext>
     </p:extLst>
   </p:cSld>
@@ -2134,7 +2134,7 @@
           <p:cNvPr id="2" name="タイトル 1">
             <a:extLst>
               <a:ext uri="{FF2B5EF4-FFF2-40B4-BE49-F238E27FC236}">
-                <a16:creationId xmlns:a16="http://schemas.microsoft.com/office/drawing/2014/main" id="{6E589C00-EE34-FD5F-DD53-619C40906BFA}"/>
+                <a16:creationId xmlns:a16="http://schemas.microsoft.com/office/drawing/2014/main" id="{5A772034-4102-1016-C788-7785C1A3DAAE}"/>
               </a:ext>
             </a:extLst>
           </p:cNvPr>
@@ -2162,7 +2162,7 @@
           <p:cNvPr id="3" name="日付プレースホルダー 2">
             <a:extLst>
               <a:ext uri="{FF2B5EF4-FFF2-40B4-BE49-F238E27FC236}">
-                <a16:creationId xmlns:a16="http://schemas.microsoft.com/office/drawing/2014/main" id="{41148758-AC38-89F3-66C1-428D73EE20DB}"/>
+                <a16:creationId xmlns:a16="http://schemas.microsoft.com/office/drawing/2014/main" id="{A40D8E7F-BEE9-BEF9-0EAD-36039050CBB4}"/>
               </a:ext>
             </a:extLst>
           </p:cNvPr>
@@ -2178,7 +2178,7 @@
           <a:bodyPr/>
           <a:lstStyle/>
           <a:p>
-            <a:fld id="{6A1F17D6-7062-4BF8-B98C-E2985FD546AB}" type="datetimeFigureOut">
+            <a:fld id="{427ADE61-E60F-4A98-AE7F-7EF4A5D76E1A}" type="datetimeFigureOut">
               <a:rPr kumimoji="1" lang="ja-JP" altLang="en-US" smtClean="0"/>
               <a:t>2026/7/30</a:t>
             </a:fld>
@@ -2191,7 +2191,7 @@
           <p:cNvPr id="4" name="フッター プレースホルダー 3">
             <a:extLst>
               <a:ext uri="{FF2B5EF4-FFF2-40B4-BE49-F238E27FC236}">
-                <a16:creationId xmlns:a16="http://schemas.microsoft.com/office/drawing/2014/main" id="{9BFC8D03-72D4-C3AF-848C-2343C2CFD424}"/>
+                <a16:creationId xmlns:a16="http://schemas.microsoft.com/office/drawing/2014/main" id="{75FBD440-B774-5BA3-C5AD-98023F3B039D}"/>
               </a:ext>
             </a:extLst>
           </p:cNvPr>
@@ -2216,7 +2216,7 @@
           <p:cNvPr id="5" name="スライド番号プレースホルダー 4">
             <a:extLst>
               <a:ext uri="{FF2B5EF4-FFF2-40B4-BE49-F238E27FC236}">
-                <a16:creationId xmlns:a16="http://schemas.microsoft.com/office/drawing/2014/main" id="{0EAD3DEF-FE72-A432-8ECF-113AF65B4016}"/>
+                <a16:creationId xmlns:a16="http://schemas.microsoft.com/office/drawing/2014/main" id="{350E345E-CFF1-79CF-DEDF-74E1FE35E424}"/>
               </a:ext>
             </a:extLst>
           </p:cNvPr>
@@ -2232,7 +2232,7 @@
           <a:bodyPr/>
           <a:lstStyle/>
           <a:p>
-            <a:fld id="{A52FF8C5-4848-4CD7-A875-AE86F1D0B263}" type="slidenum">
+            <a:fld id="{FB73397F-3170-4454-958A-B40DE46009D4}" type="slidenum">
               <a:rPr kumimoji="1" lang="ja-JP" altLang="en-US" smtClean="0"/>
               <a:t>‹#›</a:t>
             </a:fld>
@@ -2243,7 +2243,7 @@
     </p:spTree>
     <p:extLst>
       <p:ext uri="{BB962C8B-B14F-4D97-AF65-F5344CB8AC3E}">
-        <p14:creationId xmlns:p14="http://schemas.microsoft.com/office/powerpoint/2010/main" val="544001829"/>
+        <p14:creationId xmlns:p14="http://schemas.microsoft.com/office/powerpoint/2010/main" val="3025101514"/>
       </p:ext>
     </p:extLst>
   </p:cSld>
@@ -2275,7 +2275,7 @@
           <p:cNvPr id="2" name="日付プレースホルダー 1">
             <a:extLst>
               <a:ext uri="{FF2B5EF4-FFF2-40B4-BE49-F238E27FC236}">
-                <a16:creationId xmlns:a16="http://schemas.microsoft.com/office/drawing/2014/main" id="{3F60C04B-4480-A612-C214-72FBBDF882A3}"/>
+                <a16:creationId xmlns:a16="http://schemas.microsoft.com/office/drawing/2014/main" id="{CE185A16-BFB0-3CFD-1713-56088B605F64}"/>
               </a:ext>
             </a:extLst>
           </p:cNvPr>
@@ -2291,7 +2291,7 @@
           <a:bodyPr/>
           <a:lstStyle/>
           <a:p>
-            <a:fld id="{6A1F17D6-7062-4BF8-B98C-E2985FD546AB}" type="datetimeFigureOut">
+            <a:fld id="{427ADE61-E60F-4A98-AE7F-7EF4A5D76E1A}" type="datetimeFigureOut">
               <a:rPr kumimoji="1" lang="ja-JP" altLang="en-US" smtClean="0"/>
               <a:t>2026/7/30</a:t>
             </a:fld>
@@ -2304,7 +2304,7 @@
           <p:cNvPr id="3" name="フッター プレースホルダー 2">
             <a:extLst>
               <a:ext uri="{FF2B5EF4-FFF2-40B4-BE49-F238E27FC236}">
-                <a16:creationId xmlns:a16="http://schemas.microsoft.com/office/drawing/2014/main" id="{4F460AD1-9B55-ACE0-CA50-33AAAD2111C1}"/>
+                <a16:creationId xmlns:a16="http://schemas.microsoft.com/office/drawing/2014/main" id="{078BAADD-93F1-696D-52C1-AC9694EBC18F}"/>
               </a:ext>
             </a:extLst>
           </p:cNvPr>
@@ -2329,7 +2329,7 @@
           <p:cNvPr id="4" name="スライド番号プレースホルダー 3">
             <a:extLst>
               <a:ext uri="{FF2B5EF4-FFF2-40B4-BE49-F238E27FC236}">
-                <a16:creationId xmlns:a16="http://schemas.microsoft.com/office/drawing/2014/main" id="{94F2A502-048D-B42F-6EB0-DE7C9827CAF6}"/>
+                <a16:creationId xmlns:a16="http://schemas.microsoft.com/office/drawing/2014/main" id="{5426E708-EA44-DBEF-FC92-2635A74BBCD1}"/>
               </a:ext>
             </a:extLst>
           </p:cNvPr>
@@ -2345,7 +2345,7 @@
           <a:bodyPr/>
           <a:lstStyle/>
           <a:p>
-            <a:fld id="{A52FF8C5-4848-4CD7-A875-AE86F1D0B263}" type="slidenum">
+            <a:fld id="{FB73397F-3170-4454-958A-B40DE46009D4}" type="slidenum">
               <a:rPr kumimoji="1" lang="ja-JP" altLang="en-US" smtClean="0"/>
               <a:t>‹#›</a:t>
             </a:fld>
@@ -2356,7 +2356,7 @@
     </p:spTree>
     <p:extLst>
       <p:ext uri="{BB962C8B-B14F-4D97-AF65-F5344CB8AC3E}">
-        <p14:creationId xmlns:p14="http://schemas.microsoft.com/office/powerpoint/2010/main" val="133050155"/>
+        <p14:creationId xmlns:p14="http://schemas.microsoft.com/office/powerpoint/2010/main" val="3346292570"/>
       </p:ext>
     </p:extLst>
   </p:cSld>
@@ -2388,7 +2388,7 @@
           <p:cNvPr id="2" name="タイトル 1">
             <a:extLst>
               <a:ext uri="{FF2B5EF4-FFF2-40B4-BE49-F238E27FC236}">
-                <a16:creationId xmlns:a16="http://schemas.microsoft.com/office/drawing/2014/main" id="{85CC39B5-232B-E5B8-0198-8F9F0A3A74E1}"/>
+                <a16:creationId xmlns:a16="http://schemas.microsoft.com/office/drawing/2014/main" id="{880D330B-01C2-175D-6937-C205C8C4C072}"/>
               </a:ext>
             </a:extLst>
           </p:cNvPr>
@@ -2425,7 +2425,7 @@
           <p:cNvPr id="3" name="コンテンツ プレースホルダー 2">
             <a:extLst>
               <a:ext uri="{FF2B5EF4-FFF2-40B4-BE49-F238E27FC236}">
-                <a16:creationId xmlns:a16="http://schemas.microsoft.com/office/drawing/2014/main" id="{9E1430F7-A87E-B616-D928-CB0A36C6F228}"/>
+                <a16:creationId xmlns:a16="http://schemas.microsoft.com/office/drawing/2014/main" id="{155C98AF-1424-DFAC-BECC-F659CAC4C026}"/>
               </a:ext>
             </a:extLst>
           </p:cNvPr>
@@ -2547,7 +2547,7 @@
           <p:cNvPr id="4" name="テキスト プレースホルダー 3">
             <a:extLst>
               <a:ext uri="{FF2B5EF4-FFF2-40B4-BE49-F238E27FC236}">
-                <a16:creationId xmlns:a16="http://schemas.microsoft.com/office/drawing/2014/main" id="{9624AAA2-38CC-3A74-4B14-C00B903FC8EF}"/>
+                <a16:creationId xmlns:a16="http://schemas.microsoft.com/office/drawing/2014/main" id="{DAFF0677-B6F0-F40C-5DB4-8BC2A7EE532C}"/>
               </a:ext>
             </a:extLst>
           </p:cNvPr>
@@ -2618,7 +2618,7 @@
           <p:cNvPr id="5" name="日付プレースホルダー 4">
             <a:extLst>
               <a:ext uri="{FF2B5EF4-FFF2-40B4-BE49-F238E27FC236}">
-                <a16:creationId xmlns:a16="http://schemas.microsoft.com/office/drawing/2014/main" id="{2D9B9165-58D6-4C04-FFC5-6F606806E60A}"/>
+                <a16:creationId xmlns:a16="http://schemas.microsoft.com/office/drawing/2014/main" id="{702959A2-3DB5-2A3C-305C-B4A850E2DBF9}"/>
               </a:ext>
             </a:extLst>
           </p:cNvPr>
@@ -2634,7 +2634,7 @@
           <a:bodyPr/>
           <a:lstStyle/>
           <a:p>
-            <a:fld id="{6A1F17D6-7062-4BF8-B98C-E2985FD546AB}" type="datetimeFigureOut">
+            <a:fld id="{427ADE61-E60F-4A98-AE7F-7EF4A5D76E1A}" type="datetimeFigureOut">
               <a:rPr kumimoji="1" lang="ja-JP" altLang="en-US" smtClean="0"/>
               <a:t>2026/7/30</a:t>
             </a:fld>
@@ -2647,7 +2647,7 @@
           <p:cNvPr id="6" name="フッター プレースホルダー 5">
             <a:extLst>
               <a:ext uri="{FF2B5EF4-FFF2-40B4-BE49-F238E27FC236}">
-                <a16:creationId xmlns:a16="http://schemas.microsoft.com/office/drawing/2014/main" id="{EC8364D6-EBC4-73C8-DFEB-DBFB29C5A09F}"/>
+                <a16:creationId xmlns:a16="http://schemas.microsoft.com/office/drawing/2014/main" id="{9FD23687-1856-D00B-1C49-B28322143B8F}"/>
               </a:ext>
             </a:extLst>
           </p:cNvPr>
@@ -2672,7 +2672,7 @@
           <p:cNvPr id="7" name="スライド番号プレースホルダー 6">
             <a:extLst>
               <a:ext uri="{FF2B5EF4-FFF2-40B4-BE49-F238E27FC236}">
-                <a16:creationId xmlns:a16="http://schemas.microsoft.com/office/drawing/2014/main" id="{A8F9F98E-50BB-7180-1278-D3DA70DE0D4E}"/>
+                <a16:creationId xmlns:a16="http://schemas.microsoft.com/office/drawing/2014/main" id="{0155251F-97AE-C56D-3A3A-B3058A871DCD}"/>
               </a:ext>
             </a:extLst>
           </p:cNvPr>
@@ -2688,7 +2688,7 @@
           <a:bodyPr/>
           <a:lstStyle/>
           <a:p>
-            <a:fld id="{A52FF8C5-4848-4CD7-A875-AE86F1D0B263}" type="slidenum">
+            <a:fld id="{FB73397F-3170-4454-958A-B40DE46009D4}" type="slidenum">
               <a:rPr kumimoji="1" lang="ja-JP" altLang="en-US" smtClean="0"/>
               <a:t>‹#›</a:t>
             </a:fld>
@@ -2699,7 +2699,7 @@
     </p:spTree>
     <p:extLst>
       <p:ext uri="{BB962C8B-B14F-4D97-AF65-F5344CB8AC3E}">
-        <p14:creationId xmlns:p14="http://schemas.microsoft.com/office/powerpoint/2010/main" val="1383746218"/>
+        <p14:creationId xmlns:p14="http://schemas.microsoft.com/office/powerpoint/2010/main" val="4259794362"/>
       </p:ext>
     </p:extLst>
   </p:cSld>
@@ -2731,7 +2731,7 @@
           <p:cNvPr id="2" name="タイトル 1">
             <a:extLst>
               <a:ext uri="{FF2B5EF4-FFF2-40B4-BE49-F238E27FC236}">
-                <a16:creationId xmlns:a16="http://schemas.microsoft.com/office/drawing/2014/main" id="{0C02FAB1-3D35-DA32-1988-9C667287E004}"/>
+                <a16:creationId xmlns:a16="http://schemas.microsoft.com/office/drawing/2014/main" id="{A06CBA77-7A7C-1A77-D4A7-F4D8D2E2E089}"/>
               </a:ext>
             </a:extLst>
           </p:cNvPr>
@@ -2768,7 +2768,7 @@
           <p:cNvPr id="3" name="図プレースホルダー 2">
             <a:extLst>
               <a:ext uri="{FF2B5EF4-FFF2-40B4-BE49-F238E27FC236}">
-                <a16:creationId xmlns:a16="http://schemas.microsoft.com/office/drawing/2014/main" id="{59199C0B-FF57-6BC8-C374-797D7D13E755}"/>
+                <a16:creationId xmlns:a16="http://schemas.microsoft.com/office/drawing/2014/main" id="{D615069A-8966-5A9F-E453-7BF1A450BBA6}"/>
               </a:ext>
             </a:extLst>
           </p:cNvPr>
@@ -2835,7 +2835,7 @@
           <p:cNvPr id="4" name="テキスト プレースホルダー 3">
             <a:extLst>
               <a:ext uri="{FF2B5EF4-FFF2-40B4-BE49-F238E27FC236}">
-                <a16:creationId xmlns:a16="http://schemas.microsoft.com/office/drawing/2014/main" id="{E045D790-2EE2-22F9-4B0D-379F903A6AB7}"/>
+                <a16:creationId xmlns:a16="http://schemas.microsoft.com/office/drawing/2014/main" id="{E066BF5D-8B6F-9B3F-D0E4-9E7CB42F56D6}"/>
               </a:ext>
             </a:extLst>
           </p:cNvPr>
@@ -2906,7 +2906,7 @@
           <p:cNvPr id="5" name="日付プレースホルダー 4">
             <a:extLst>
               <a:ext uri="{FF2B5EF4-FFF2-40B4-BE49-F238E27FC236}">
-                <a16:creationId xmlns:a16="http://schemas.microsoft.com/office/drawing/2014/main" id="{8301376C-D1FE-5148-5F02-F09A78653986}"/>
+                <a16:creationId xmlns:a16="http://schemas.microsoft.com/office/drawing/2014/main" id="{9A41D71B-1DCE-5C94-9379-02C5AE8E2441}"/>
               </a:ext>
             </a:extLst>
           </p:cNvPr>
@@ -2922,7 +2922,7 @@
           <a:bodyPr/>
           <a:lstStyle/>
           <a:p>
-            <a:fld id="{6A1F17D6-7062-4BF8-B98C-E2985FD546AB}" type="datetimeFigureOut">
+            <a:fld id="{427ADE61-E60F-4A98-AE7F-7EF4A5D76E1A}" type="datetimeFigureOut">
               <a:rPr kumimoji="1" lang="ja-JP" altLang="en-US" smtClean="0"/>
               <a:t>2026/7/30</a:t>
             </a:fld>
@@ -2935,7 +2935,7 @@
           <p:cNvPr id="6" name="フッター プレースホルダー 5">
             <a:extLst>
               <a:ext uri="{FF2B5EF4-FFF2-40B4-BE49-F238E27FC236}">
-                <a16:creationId xmlns:a16="http://schemas.microsoft.com/office/drawing/2014/main" id="{304D387D-1019-8E69-A78F-1F925FC4C936}"/>
+                <a16:creationId xmlns:a16="http://schemas.microsoft.com/office/drawing/2014/main" id="{7CCA58B4-19C0-0299-F2FE-6A3401E29231}"/>
               </a:ext>
             </a:extLst>
           </p:cNvPr>
@@ -2960,7 +2960,7 @@
           <p:cNvPr id="7" name="スライド番号プレースホルダー 6">
             <a:extLst>
               <a:ext uri="{FF2B5EF4-FFF2-40B4-BE49-F238E27FC236}">
-                <a16:creationId xmlns:a16="http://schemas.microsoft.com/office/drawing/2014/main" id="{DC5188EE-DBBE-67B5-FFF4-F7AC8B81FDAD}"/>
+                <a16:creationId xmlns:a16="http://schemas.microsoft.com/office/drawing/2014/main" id="{111E84D7-206F-8322-4F89-22454B10A3FE}"/>
               </a:ext>
             </a:extLst>
           </p:cNvPr>
@@ -2976,7 +2976,7 @@
           <a:bodyPr/>
           <a:lstStyle/>
           <a:p>
-            <a:fld id="{A52FF8C5-4848-4CD7-A875-AE86F1D0B263}" type="slidenum">
+            <a:fld id="{FB73397F-3170-4454-958A-B40DE46009D4}" type="slidenum">
               <a:rPr kumimoji="1" lang="ja-JP" altLang="en-US" smtClean="0"/>
               <a:t>‹#›</a:t>
             </a:fld>
@@ -2987,7 +2987,7 @@
     </p:spTree>
     <p:extLst>
       <p:ext uri="{BB962C8B-B14F-4D97-AF65-F5344CB8AC3E}">
-        <p14:creationId xmlns:p14="http://schemas.microsoft.com/office/powerpoint/2010/main" val="1033141425"/>
+        <p14:creationId xmlns:p14="http://schemas.microsoft.com/office/powerpoint/2010/main" val="886049568"/>
       </p:ext>
     </p:extLst>
   </p:cSld>
@@ -3024,7 +3024,7 @@
           <p:cNvPr id="2" name="タイトル プレースホルダー 1">
             <a:extLst>
               <a:ext uri="{FF2B5EF4-FFF2-40B4-BE49-F238E27FC236}">
-                <a16:creationId xmlns:a16="http://schemas.microsoft.com/office/drawing/2014/main" id="{8734EBA0-C2E2-15F9-8820-6E44A75CA2D8}"/>
+                <a16:creationId xmlns:a16="http://schemas.microsoft.com/office/drawing/2014/main" id="{AF54B62A-C4AE-C5BB-D69E-E4BD0F545793}"/>
               </a:ext>
             </a:extLst>
           </p:cNvPr>
@@ -3062,7 +3062,7 @@
           <p:cNvPr id="3" name="テキスト プレースホルダー 2">
             <a:extLst>
               <a:ext uri="{FF2B5EF4-FFF2-40B4-BE49-F238E27FC236}">
-                <a16:creationId xmlns:a16="http://schemas.microsoft.com/office/drawing/2014/main" id="{1E47731F-9DE9-9D87-E624-0D2BAB51BEB7}"/>
+                <a16:creationId xmlns:a16="http://schemas.microsoft.com/office/drawing/2014/main" id="{56B18668-19BC-F14C-DD30-C83F0D883559}"/>
               </a:ext>
             </a:extLst>
           </p:cNvPr>
@@ -3161,7 +3161,7 @@
           <p:cNvPr id="4" name="日付プレースホルダー 3">
             <a:extLst>
               <a:ext uri="{FF2B5EF4-FFF2-40B4-BE49-F238E27FC236}">
-                <a16:creationId xmlns:a16="http://schemas.microsoft.com/office/drawing/2014/main" id="{F13B4869-B12D-7BF9-55A4-5C45C06D80C7}"/>
+                <a16:creationId xmlns:a16="http://schemas.microsoft.com/office/drawing/2014/main" id="{983F15A3-6A70-2DD7-B1F3-C89F70E2BEB3}"/>
               </a:ext>
             </a:extLst>
           </p:cNvPr>
@@ -3195,7 +3195,7 @@
             </a:lvl1pPr>
           </a:lstStyle>
           <a:p>
-            <a:fld id="{6A1F17D6-7062-4BF8-B98C-E2985FD546AB}" type="datetimeFigureOut">
+            <a:fld id="{427ADE61-E60F-4A98-AE7F-7EF4A5D76E1A}" type="datetimeFigureOut">
               <a:rPr kumimoji="1" lang="ja-JP" altLang="en-US" smtClean="0"/>
               <a:t>2026/7/30</a:t>
             </a:fld>
@@ -3208,7 +3208,7 @@
           <p:cNvPr id="5" name="フッター プレースホルダー 4">
             <a:extLst>
               <a:ext uri="{FF2B5EF4-FFF2-40B4-BE49-F238E27FC236}">
-                <a16:creationId xmlns:a16="http://schemas.microsoft.com/office/drawing/2014/main" id="{5301CE9E-0FC1-8652-8EF7-AD9DD723C6B2}"/>
+                <a16:creationId xmlns:a16="http://schemas.microsoft.com/office/drawing/2014/main" id="{DCCC2B59-7710-842C-2967-2A094C22DC27}"/>
               </a:ext>
             </a:extLst>
           </p:cNvPr>
@@ -3251,7 +3251,7 @@
           <p:cNvPr id="6" name="スライド番号プレースホルダー 5">
             <a:extLst>
               <a:ext uri="{FF2B5EF4-FFF2-40B4-BE49-F238E27FC236}">
-                <a16:creationId xmlns:a16="http://schemas.microsoft.com/office/drawing/2014/main" id="{52039709-A400-52DF-4D41-08FE281E17D5}"/>
+                <a16:creationId xmlns:a16="http://schemas.microsoft.com/office/drawing/2014/main" id="{88C51072-3ACE-9256-B45E-072A273F6D73}"/>
               </a:ext>
             </a:extLst>
           </p:cNvPr>
@@ -3285,7 +3285,7 @@
             </a:lvl1pPr>
           </a:lstStyle>
           <a:p>
-            <a:fld id="{A52FF8C5-4848-4CD7-A875-AE86F1D0B263}" type="slidenum">
+            <a:fld id="{FB73397F-3170-4454-958A-B40DE46009D4}" type="slidenum">
               <a:rPr kumimoji="1" lang="ja-JP" altLang="en-US" smtClean="0"/>
               <a:t>‹#›</a:t>
             </a:fld>
@@ -3296,7 +3296,7 @@
     </p:spTree>
     <p:extLst>
       <p:ext uri="{BB962C8B-B14F-4D97-AF65-F5344CB8AC3E}">
-        <p14:creationId xmlns:p14="http://schemas.microsoft.com/office/powerpoint/2010/main" val="3523666284"/>
+        <p14:creationId xmlns:p14="http://schemas.microsoft.com/office/powerpoint/2010/main" val="2158829911"/>
       </p:ext>
     </p:extLst>
   </p:cSld>
@@ -3619,7 +3619,7 @@
           <p:cNvPr id="2" name="テキスト ボックス 1">
             <a:extLst>
               <a:ext uri="{FF2B5EF4-FFF2-40B4-BE49-F238E27FC236}">
-                <a16:creationId xmlns:a16="http://schemas.microsoft.com/office/drawing/2014/main" id="{AA1003E3-F936-85B7-8062-5F3AD6E48460}"/>
+                <a16:creationId xmlns:a16="http://schemas.microsoft.com/office/drawing/2014/main" id="{E014CDE3-A951-589F-0C36-9C9A2B14756D}"/>
               </a:ext>
             </a:extLst>
           </p:cNvPr>
@@ -3665,7 +3665,7 @@
           <p:cNvPr id="3" name="テキスト ボックス 2">
             <a:extLst>
               <a:ext uri="{FF2B5EF4-FFF2-40B4-BE49-F238E27FC236}">
-                <a16:creationId xmlns:a16="http://schemas.microsoft.com/office/drawing/2014/main" id="{4FD3E9AF-EC0B-68E5-0D18-7F3F89548AF1}"/>
+                <a16:creationId xmlns:a16="http://schemas.microsoft.com/office/drawing/2014/main" id="{DA16DD5C-4851-4F4B-C8D3-2E12E238437F}"/>
               </a:ext>
             </a:extLst>
           </p:cNvPr>
@@ -3714,7 +3714,7 @@
           <p:cNvPr id="4" name="テキスト ボックス 3">
             <a:extLst>
               <a:ext uri="{FF2B5EF4-FFF2-40B4-BE49-F238E27FC236}">
-                <a16:creationId xmlns:a16="http://schemas.microsoft.com/office/drawing/2014/main" id="{6E7CF1AE-BBEF-470C-EB4A-F5505AFA9761}"/>
+                <a16:creationId xmlns:a16="http://schemas.microsoft.com/office/drawing/2014/main" id="{0CB8A9E0-4D3F-BF86-F403-8A0D58091850}"/>
               </a:ext>
             </a:extLst>
           </p:cNvPr>
@@ -3754,7 +3754,7 @@
           <p:cNvPr id="5" name="テキスト ボックス 4">
             <a:extLst>
               <a:ext uri="{FF2B5EF4-FFF2-40B4-BE49-F238E27FC236}">
-                <a16:creationId xmlns:a16="http://schemas.microsoft.com/office/drawing/2014/main" id="{7D5AD2A7-D70D-EAD3-5D1D-F24EE06E1A66}"/>
+                <a16:creationId xmlns:a16="http://schemas.microsoft.com/office/drawing/2014/main" id="{7AA74985-964B-0D6D-C3AD-2D15DE24C9B2}"/>
               </a:ext>
             </a:extLst>
           </p:cNvPr>
@@ -3801,7 +3801,7 @@
             <a:hlinkClick r:id="" action="ppaction://media"/>
             <a:extLst>
               <a:ext uri="{FF2B5EF4-FFF2-40B4-BE49-F238E27FC236}">
-                <a16:creationId xmlns:a16="http://schemas.microsoft.com/office/drawing/2014/main" id="{4AAFFE58-97E2-A06A-C76E-DEEB92E59946}"/>
+                <a16:creationId xmlns:a16="http://schemas.microsoft.com/office/drawing/2014/main" id="{8EF3ED7E-981A-C228-EFF5-975AC70F765B}"/>
               </a:ext>
             </a:extLst>
           </p:cNvPr>
@@ -3836,7 +3836,7 @@
     </p:spTree>
     <p:extLst>
       <p:ext uri="{BB962C8B-B14F-4D97-AF65-F5344CB8AC3E}">
-        <p14:creationId xmlns:p14="http://schemas.microsoft.com/office/powerpoint/2010/main" val="2256409652"/>
+        <p14:creationId xmlns:p14="http://schemas.microsoft.com/office/powerpoint/2010/main" val="1010835187"/>
       </p:ext>
     </p:extLst>
   </p:cSld>
@@ -3960,7 +3960,7 @@
           <p:cNvPr id="2" name="テキスト ボックス 1">
             <a:extLst>
               <a:ext uri="{FF2B5EF4-FFF2-40B4-BE49-F238E27FC236}">
-                <a16:creationId xmlns:a16="http://schemas.microsoft.com/office/drawing/2014/main" id="{D6F1F8B8-381D-D87D-1737-162DCEF134A7}"/>
+                <a16:creationId xmlns:a16="http://schemas.microsoft.com/office/drawing/2014/main" id="{59895744-6C6F-53DA-F380-C68C746A8EDB}"/>
               </a:ext>
             </a:extLst>
           </p:cNvPr>
@@ -4006,7 +4006,7 @@
           <p:cNvPr id="3" name="テキスト ボックス 2">
             <a:extLst>
               <a:ext uri="{FF2B5EF4-FFF2-40B4-BE49-F238E27FC236}">
-                <a16:creationId xmlns:a16="http://schemas.microsoft.com/office/drawing/2014/main" id="{17E2C523-EBEE-05E9-012E-6EEE89B00989}"/>
+                <a16:creationId xmlns:a16="http://schemas.microsoft.com/office/drawing/2014/main" id="{5BAF8D8F-367C-4C20-67E9-6DCAA12EC657}"/>
               </a:ext>
             </a:extLst>
           </p:cNvPr>
@@ -4046,7 +4046,7 @@
           <p:cNvPr id="4" name="テキスト ボックス 3">
             <a:extLst>
               <a:ext uri="{FF2B5EF4-FFF2-40B4-BE49-F238E27FC236}">
-                <a16:creationId xmlns:a16="http://schemas.microsoft.com/office/drawing/2014/main" id="{BA07CF90-623B-DF68-F1C2-8401D4673EA3}"/>
+                <a16:creationId xmlns:a16="http://schemas.microsoft.com/office/drawing/2014/main" id="{2792913E-ECEC-6F66-FD32-78E1354C3FBD}"/>
               </a:ext>
             </a:extLst>
           </p:cNvPr>
@@ -4076,14 +4076,17 @@
                 </a:solidFill>
                 <a:latin typeface="Arial" panose="020B0604020202020204" pitchFamily="34" charset="0"/>
               </a:rPr>
-              <a:t>About Laravel Laravel is a web application framework with expressive, elegant syntax</a:t>
-            </a:r>
-            <a:endParaRPr kumimoji="1" lang="ja-JP" altLang="en-US" sz="2000">
-              <a:solidFill>
-                <a:srgbClr val="333333"/>
-              </a:solidFill>
-              <a:latin typeface="Arial" panose="020B0604020202020204" pitchFamily="34" charset="0"/>
-            </a:endParaRPr>
+              <a:t>Kaden Hikaku</a:t>
+            </a:r>
+            <a:r>
+              <a:rPr kumimoji="1" lang="ja-JP" altLang="en-US" sz="2000">
+                <a:solidFill>
+                  <a:srgbClr val="333333"/>
+                </a:solidFill>
+                <a:latin typeface="Arial" panose="020B0604020202020204" pitchFamily="34" charset="0"/>
+              </a:rPr>
+              <a:t>の目的、構成、実装を公開コードから確認できるプロジェクトです。</a:t>
+            </a:r>
           </a:p>
         </p:txBody>
       </p:sp>
@@ -4092,7 +4095,7 @@
           <p:cNvPr id="5" name="テキスト ボックス 4">
             <a:extLst>
               <a:ext uri="{FF2B5EF4-FFF2-40B4-BE49-F238E27FC236}">
-                <a16:creationId xmlns:a16="http://schemas.microsoft.com/office/drawing/2014/main" id="{269ED086-0B89-70A1-EBF6-F139A582408E}"/>
+                <a16:creationId xmlns:a16="http://schemas.microsoft.com/office/drawing/2014/main" id="{60CB488A-B8E8-976F-3487-F915B3DFDD8F}"/>
               </a:ext>
             </a:extLst>
           </p:cNvPr>
@@ -4139,7 +4142,7 @@
             <a:hlinkClick r:id="" action="ppaction://media"/>
             <a:extLst>
               <a:ext uri="{FF2B5EF4-FFF2-40B4-BE49-F238E27FC236}">
-                <a16:creationId xmlns:a16="http://schemas.microsoft.com/office/drawing/2014/main" id="{95040E82-FEB5-A0C7-B959-778A89201988}"/>
+                <a16:creationId xmlns:a16="http://schemas.microsoft.com/office/drawing/2014/main" id="{088F92BB-F0CD-5AFA-1767-F3040C70ED4D}"/>
               </a:ext>
             </a:extLst>
           </p:cNvPr>
@@ -4174,7 +4177,7 @@
     </p:spTree>
     <p:extLst>
       <p:ext uri="{BB962C8B-B14F-4D97-AF65-F5344CB8AC3E}">
-        <p14:creationId xmlns:p14="http://schemas.microsoft.com/office/powerpoint/2010/main" val="3981428078"/>
+        <p14:creationId xmlns:p14="http://schemas.microsoft.com/office/powerpoint/2010/main" val="3637895149"/>
       </p:ext>
     </p:extLst>
   </p:cSld>
@@ -4217,7 +4220,7 @@
                                   <p:childTnLst>
                                     <p:cmd type="call" cmd="playFrom(0.0)">
                                       <p:cBhvr>
-                                        <p:cTn id="6" dur="7780" fill="hold"/>
+                                        <p:cTn id="6" dur="7016" fill="hold"/>
                                         <p:tgtEl>
                                           <p:spTgt spid="6"/>
                                         </p:tgtEl>
@@ -4298,7 +4301,7 @@
           <p:cNvPr id="2" name="テキスト ボックス 1">
             <a:extLst>
               <a:ext uri="{FF2B5EF4-FFF2-40B4-BE49-F238E27FC236}">
-                <a16:creationId xmlns:a16="http://schemas.microsoft.com/office/drawing/2014/main" id="{70DECA45-FF71-B4B1-8298-F13D093FFFC6}"/>
+                <a16:creationId xmlns:a16="http://schemas.microsoft.com/office/drawing/2014/main" id="{5E5F6E83-BE15-7C62-03C6-DC360EDA4AC6}"/>
               </a:ext>
             </a:extLst>
           </p:cNvPr>
@@ -4344,7 +4347,7 @@
           <p:cNvPr id="3" name="テキスト ボックス 2">
             <a:extLst>
               <a:ext uri="{FF2B5EF4-FFF2-40B4-BE49-F238E27FC236}">
-                <a16:creationId xmlns:a16="http://schemas.microsoft.com/office/drawing/2014/main" id="{F08F03CA-B749-65CF-73E4-F9D5789A33D2}"/>
+                <a16:creationId xmlns:a16="http://schemas.microsoft.com/office/drawing/2014/main" id="{ED7C26E9-56E7-7D93-7951-38567D5FBD78}"/>
               </a:ext>
             </a:extLst>
           </p:cNvPr>
@@ -4384,7 +4387,7 @@
           <p:cNvPr id="4" name="テキスト ボックス 3">
             <a:extLst>
               <a:ext uri="{FF2B5EF4-FFF2-40B4-BE49-F238E27FC236}">
-                <a16:creationId xmlns:a16="http://schemas.microsoft.com/office/drawing/2014/main" id="{C85D6258-5376-91C1-B8B2-A4C370B69583}"/>
+                <a16:creationId xmlns:a16="http://schemas.microsoft.com/office/drawing/2014/main" id="{70EAF75F-B53B-BDD4-5512-52105DE724CC}"/>
               </a:ext>
             </a:extLst>
           </p:cNvPr>
@@ -4497,7 +4500,7 @@
           <p:cNvPr id="5" name="テキスト ボックス 4">
             <a:extLst>
               <a:ext uri="{FF2B5EF4-FFF2-40B4-BE49-F238E27FC236}">
-                <a16:creationId xmlns:a16="http://schemas.microsoft.com/office/drawing/2014/main" id="{038F8A5C-9268-4C92-AD0A-27AD6CEB505F}"/>
+                <a16:creationId xmlns:a16="http://schemas.microsoft.com/office/drawing/2014/main" id="{CA444639-4255-D877-A3CF-227AACD81CF8}"/>
               </a:ext>
             </a:extLst>
           </p:cNvPr>
@@ -4544,7 +4547,7 @@
             <a:hlinkClick r:id="" action="ppaction://media"/>
             <a:extLst>
               <a:ext uri="{FF2B5EF4-FFF2-40B4-BE49-F238E27FC236}">
-                <a16:creationId xmlns:a16="http://schemas.microsoft.com/office/drawing/2014/main" id="{1A994898-BEF4-3AAE-FA82-476C505491EC}"/>
+                <a16:creationId xmlns:a16="http://schemas.microsoft.com/office/drawing/2014/main" id="{DA6387A9-53CA-84C6-459F-59B8A1C8F475}"/>
               </a:ext>
             </a:extLst>
           </p:cNvPr>
@@ -4579,7 +4582,7 @@
     </p:spTree>
     <p:extLst>
       <p:ext uri="{BB962C8B-B14F-4D97-AF65-F5344CB8AC3E}">
-        <p14:creationId xmlns:p14="http://schemas.microsoft.com/office/powerpoint/2010/main" val="2743094022"/>
+        <p14:creationId xmlns:p14="http://schemas.microsoft.com/office/powerpoint/2010/main" val="1955493952"/>
       </p:ext>
     </p:extLst>
   </p:cSld>
@@ -4703,7 +4706,7 @@
           <p:cNvPr id="2" name="テキスト ボックス 1">
             <a:extLst>
               <a:ext uri="{FF2B5EF4-FFF2-40B4-BE49-F238E27FC236}">
-                <a16:creationId xmlns:a16="http://schemas.microsoft.com/office/drawing/2014/main" id="{25E3423D-7869-1F00-C6FA-651CAF0726E8}"/>
+                <a16:creationId xmlns:a16="http://schemas.microsoft.com/office/drawing/2014/main" id="{3DF21AF6-189B-D9C2-C06B-5864527E345E}"/>
               </a:ext>
             </a:extLst>
           </p:cNvPr>
@@ -4749,7 +4752,7 @@
           <p:cNvPr id="3" name="テキスト ボックス 2">
             <a:extLst>
               <a:ext uri="{FF2B5EF4-FFF2-40B4-BE49-F238E27FC236}">
-                <a16:creationId xmlns:a16="http://schemas.microsoft.com/office/drawing/2014/main" id="{753E3F65-57A2-6EE7-540C-B0D76960E433}"/>
+                <a16:creationId xmlns:a16="http://schemas.microsoft.com/office/drawing/2014/main" id="{8933293F-7A82-1413-3E11-F80CB402135D}"/>
               </a:ext>
             </a:extLst>
           </p:cNvPr>
@@ -4789,7 +4792,7 @@
           <p:cNvPr id="4" name="テキスト ボックス 3">
             <a:extLst>
               <a:ext uri="{FF2B5EF4-FFF2-40B4-BE49-F238E27FC236}">
-                <a16:creationId xmlns:a16="http://schemas.microsoft.com/office/drawing/2014/main" id="{E5A0EC8D-22C7-61EC-C209-9C1B8C8C2889}"/>
+                <a16:creationId xmlns:a16="http://schemas.microsoft.com/office/drawing/2014/main" id="{55D34E86-DBA1-B8E8-FA77-3374BC7551A0}"/>
               </a:ext>
             </a:extLst>
           </p:cNvPr>
@@ -4899,7 +4902,7 @@
           <p:cNvPr id="5" name="テキスト ボックス 4">
             <a:extLst>
               <a:ext uri="{FF2B5EF4-FFF2-40B4-BE49-F238E27FC236}">
-                <a16:creationId xmlns:a16="http://schemas.microsoft.com/office/drawing/2014/main" id="{E1615AC6-7157-7614-F4E3-3DF0D79C4132}"/>
+                <a16:creationId xmlns:a16="http://schemas.microsoft.com/office/drawing/2014/main" id="{25DA1029-A23E-1018-AFF1-A07999D91976}"/>
               </a:ext>
             </a:extLst>
           </p:cNvPr>
@@ -4946,7 +4949,7 @@
             <a:hlinkClick r:id="" action="ppaction://media"/>
             <a:extLst>
               <a:ext uri="{FF2B5EF4-FFF2-40B4-BE49-F238E27FC236}">
-                <a16:creationId xmlns:a16="http://schemas.microsoft.com/office/drawing/2014/main" id="{92B113A7-3601-6C1A-F81C-EB73F3B7976A}"/>
+                <a16:creationId xmlns:a16="http://schemas.microsoft.com/office/drawing/2014/main" id="{F5F6938E-2A1E-0053-1B19-0483DE736603}"/>
               </a:ext>
             </a:extLst>
           </p:cNvPr>
@@ -4981,7 +4984,7 @@
     </p:spTree>
     <p:extLst>
       <p:ext uri="{BB962C8B-B14F-4D97-AF65-F5344CB8AC3E}">
-        <p14:creationId xmlns:p14="http://schemas.microsoft.com/office/powerpoint/2010/main" val="317454070"/>
+        <p14:creationId xmlns:p14="http://schemas.microsoft.com/office/powerpoint/2010/main" val="4008270111"/>
       </p:ext>
     </p:extLst>
   </p:cSld>
@@ -5105,7 +5108,7 @@
           <p:cNvPr id="2" name="テキスト ボックス 1">
             <a:extLst>
               <a:ext uri="{FF2B5EF4-FFF2-40B4-BE49-F238E27FC236}">
-                <a16:creationId xmlns:a16="http://schemas.microsoft.com/office/drawing/2014/main" id="{DE87CD35-F253-38F2-4ABE-D4FCCCEE5352}"/>
+                <a16:creationId xmlns:a16="http://schemas.microsoft.com/office/drawing/2014/main" id="{6A6A779D-B186-956E-1315-D84A5C2BB61D}"/>
               </a:ext>
             </a:extLst>
           </p:cNvPr>
@@ -5151,7 +5154,7 @@
           <p:cNvPr id="3" name="テキスト ボックス 2">
             <a:extLst>
               <a:ext uri="{FF2B5EF4-FFF2-40B4-BE49-F238E27FC236}">
-                <a16:creationId xmlns:a16="http://schemas.microsoft.com/office/drawing/2014/main" id="{D446F13C-7B49-488B-25A9-21CA7654AFB1}"/>
+                <a16:creationId xmlns:a16="http://schemas.microsoft.com/office/drawing/2014/main" id="{8B3D2F88-00D4-50D5-835E-20E2AA019E9B}"/>
               </a:ext>
             </a:extLst>
           </p:cNvPr>
@@ -5191,7 +5194,7 @@
           <p:cNvPr id="4" name="テキスト ボックス 3">
             <a:extLst>
               <a:ext uri="{FF2B5EF4-FFF2-40B4-BE49-F238E27FC236}">
-                <a16:creationId xmlns:a16="http://schemas.microsoft.com/office/drawing/2014/main" id="{3777EC22-08DB-3E83-AD8B-D812D3295500}"/>
+                <a16:creationId xmlns:a16="http://schemas.microsoft.com/office/drawing/2014/main" id="{CDD78260-A491-681D-0CEE-04DE9B775127}"/>
               </a:ext>
             </a:extLst>
           </p:cNvPr>
@@ -5215,56 +5218,14 @@
           <a:lstStyle/>
           <a:p>
             <a:r>
-              <a:rPr kumimoji="1" lang="en-US" altLang="ja-JP" sz="2000">
-                <a:solidFill>
-                  <a:srgbClr val="333333"/>
-                </a:solidFill>
-                <a:latin typeface="Arial" panose="020B0604020202020204" pitchFamily="34" charset="0"/>
-              </a:rPr>
-              <a:t>LINE</a:t>
-            </a:r>
-            <a:r>
               <a:rPr kumimoji="1" lang="ja-JP" altLang="en-US" sz="2000">
                 <a:solidFill>
                   <a:srgbClr val="333333"/>
                 </a:solidFill>
                 <a:latin typeface="Arial" panose="020B0604020202020204" pitchFamily="34" charset="0"/>
               </a:rPr>
-              <a:t>価格ウォッチ通知を追加</a:t>
-            </a:r>
-            <a:r>
-              <a:rPr kumimoji="1" lang="en-US" altLang="ja-JP" sz="2000">
-                <a:solidFill>
-                  <a:srgbClr val="333333"/>
-                </a:solidFill>
-                <a:latin typeface="Arial" panose="020B0604020202020204" pitchFamily="34" charset="0"/>
-              </a:rPr>
-              <a:t>(</a:t>
-            </a:r>
-            <a:r>
-              <a:rPr kumimoji="1" lang="ja-JP" altLang="en-US" sz="2000">
-                <a:solidFill>
-                  <a:srgbClr val="333333"/>
-                </a:solidFill>
-                <a:latin typeface="Arial" panose="020B0604020202020204" pitchFamily="34" charset="0"/>
-              </a:rPr>
-              <a:t>値下がり検知</a:t>
-            </a:r>
-            <a:r>
-              <a:rPr kumimoji="1" lang="en-US" altLang="ja-JP" sz="2000">
-                <a:solidFill>
-                  <a:srgbClr val="333333"/>
-                </a:solidFill>
-                <a:latin typeface="Arial" panose="020B0604020202020204" pitchFamily="34" charset="0"/>
-              </a:rPr>
-              <a:t>)</a:t>
-            </a:r>
-            <a:endParaRPr kumimoji="1" lang="ja-JP" altLang="en-US" sz="2000">
-              <a:solidFill>
-                <a:srgbClr val="333333"/>
-              </a:solidFill>
-              <a:latin typeface="Arial" panose="020B0604020202020204" pitchFamily="34" charset="0"/>
-            </a:endParaRPr>
+              <a:t>直近のコミットでは、実装の見直しと継続的な改善が行われました。</a:t>
+            </a:r>
           </a:p>
         </p:txBody>
       </p:sp>
@@ -5273,7 +5234,7 @@
           <p:cNvPr id="5" name="テキスト ボックス 4">
             <a:extLst>
               <a:ext uri="{FF2B5EF4-FFF2-40B4-BE49-F238E27FC236}">
-                <a16:creationId xmlns:a16="http://schemas.microsoft.com/office/drawing/2014/main" id="{39AB7CA1-994B-7FB8-3E69-886640AACDB6}"/>
+                <a16:creationId xmlns:a16="http://schemas.microsoft.com/office/drawing/2014/main" id="{1A556C67-C46D-5EA0-CECA-1F525B1C2377}"/>
               </a:ext>
             </a:extLst>
           </p:cNvPr>
@@ -5320,7 +5281,7 @@
             <a:hlinkClick r:id="" action="ppaction://media"/>
             <a:extLst>
               <a:ext uri="{FF2B5EF4-FFF2-40B4-BE49-F238E27FC236}">
-                <a16:creationId xmlns:a16="http://schemas.microsoft.com/office/drawing/2014/main" id="{CE9C4ED4-145F-7882-954D-706ADC4994AC}"/>
+                <a16:creationId xmlns:a16="http://schemas.microsoft.com/office/drawing/2014/main" id="{3B9DE470-196B-50D2-972C-946DF167CA02}"/>
               </a:ext>
             </a:extLst>
           </p:cNvPr>
@@ -5355,7 +5316,7 @@
     </p:spTree>
     <p:extLst>
       <p:ext uri="{BB962C8B-B14F-4D97-AF65-F5344CB8AC3E}">
-        <p14:creationId xmlns:p14="http://schemas.microsoft.com/office/powerpoint/2010/main" val="3169251972"/>
+        <p14:creationId xmlns:p14="http://schemas.microsoft.com/office/powerpoint/2010/main" val="2838530224"/>
       </p:ext>
     </p:extLst>
   </p:cSld>
@@ -5364,10 +5325,10 @@
   </p:clrMapOvr>
   <mc:AlternateContent xmlns:mc="http://schemas.openxmlformats.org/markup-compatibility/2006">
     <mc:Choice xmlns:p14="http://schemas.microsoft.com/office/powerpoint/2010/main" Requires="p14">
-      <p:transition spd="slow" p14:dur="2000" advTm="9000"/>
+      <p:transition spd="slow" p14:dur="2000" advTm="7000"/>
     </mc:Choice>
     <mc:Fallback>
-      <p:transition spd="slow" advTm="9000"/>
+      <p:transition spd="slow" advTm="7000"/>
     </mc:Fallback>
   </mc:AlternateContent>
   <p:timing>
@@ -5398,7 +5359,7 @@
                                   <p:childTnLst>
                                     <p:cmd type="call" cmd="playFrom(0.0)">
                                       <p:cBhvr>
-                                        <p:cTn id="6" dur="8161" fill="hold"/>
+                                        <p:cTn id="6" dur="6076" fill="hold"/>
                                         <p:tgtEl>
                                           <p:spTgt spid="6"/>
                                         </p:tgtEl>
@@ -5479,7 +5440,7 @@
           <p:cNvPr id="2" name="テキスト ボックス 1">
             <a:extLst>
               <a:ext uri="{FF2B5EF4-FFF2-40B4-BE49-F238E27FC236}">
-                <a16:creationId xmlns:a16="http://schemas.microsoft.com/office/drawing/2014/main" id="{424DC9EC-F127-C292-AD69-E5752DE64C1B}"/>
+                <a16:creationId xmlns:a16="http://schemas.microsoft.com/office/drawing/2014/main" id="{CBC20EF0-12AE-7EB0-A99C-5B0483889225}"/>
               </a:ext>
             </a:extLst>
           </p:cNvPr>
@@ -5525,7 +5486,7 @@
           <p:cNvPr id="3" name="テキスト ボックス 2">
             <a:extLst>
               <a:ext uri="{FF2B5EF4-FFF2-40B4-BE49-F238E27FC236}">
-                <a16:creationId xmlns:a16="http://schemas.microsoft.com/office/drawing/2014/main" id="{9EFD5FAC-3733-DCB9-9CEB-9CC9DF6FBB6D}"/>
+                <a16:creationId xmlns:a16="http://schemas.microsoft.com/office/drawing/2014/main" id="{E67A044E-6C15-033B-0BD8-4D8505F8516C}"/>
               </a:ext>
             </a:extLst>
           </p:cNvPr>
@@ -5565,7 +5526,7 @@
           <p:cNvPr id="4" name="テキスト ボックス 3">
             <a:extLst>
               <a:ext uri="{FF2B5EF4-FFF2-40B4-BE49-F238E27FC236}">
-                <a16:creationId xmlns:a16="http://schemas.microsoft.com/office/drawing/2014/main" id="{6DEA75C1-387D-53DC-0632-DD43A9D82A1D}"/>
+                <a16:creationId xmlns:a16="http://schemas.microsoft.com/office/drawing/2014/main" id="{B19EF0E3-C7B7-64BF-32FB-308D0AF5F3A4}"/>
               </a:ext>
             </a:extLst>
           </p:cNvPr>
@@ -5630,7 +5591,7 @@
           <p:cNvPr id="5" name="テキスト ボックス 4">
             <a:extLst>
               <a:ext uri="{FF2B5EF4-FFF2-40B4-BE49-F238E27FC236}">
-                <a16:creationId xmlns:a16="http://schemas.microsoft.com/office/drawing/2014/main" id="{DA265B6D-5A15-3DFB-416B-F654FA4256BF}"/>
+                <a16:creationId xmlns:a16="http://schemas.microsoft.com/office/drawing/2014/main" id="{BCC0ADC4-0FD4-28A4-64CA-EE2800AAC00C}"/>
               </a:ext>
             </a:extLst>
           </p:cNvPr>
@@ -5677,7 +5638,7 @@
             <a:hlinkClick r:id="" action="ppaction://media"/>
             <a:extLst>
               <a:ext uri="{FF2B5EF4-FFF2-40B4-BE49-F238E27FC236}">
-                <a16:creationId xmlns:a16="http://schemas.microsoft.com/office/drawing/2014/main" id="{675CE83C-18E4-3CA3-8CFF-6120ADF95D23}"/>
+                <a16:creationId xmlns:a16="http://schemas.microsoft.com/office/drawing/2014/main" id="{A37BC36B-79C2-6B9A-FC2A-4C72E6D4A69E}"/>
               </a:ext>
             </a:extLst>
           </p:cNvPr>
@@ -5712,7 +5673,7 @@
     </p:spTree>
     <p:extLst>
       <p:ext uri="{BB962C8B-B14F-4D97-AF65-F5344CB8AC3E}">
-        <p14:creationId xmlns:p14="http://schemas.microsoft.com/office/powerpoint/2010/main" val="3719905918"/>
+        <p14:creationId xmlns:p14="http://schemas.microsoft.com/office/powerpoint/2010/main" val="630088870"/>
       </p:ext>
     </p:extLst>
   </p:cSld>
